--- a/docs/RetailVision_presentation.pptx
+++ b/docs/RetailVision_presentation.pptx
@@ -116,39 +116,39 @@
   <p:extLst>
     <p:ext uri="{521415D9-36F7-43E2-AB2F-B90AF26B5E84}">
       <p14:sectionLst xmlns:p14="http://schemas.microsoft.com/office/powerpoint/2010/main">
-        <p14:section name="Opening" id="{74b637d0-f8f1-6b1c-1e50-9808abf32434}">
+        <p14:section name="Opening" id="{f2143fbe-2a7b-db73-01ab-a917b4883e28}">
           <p14:sldIdLst>
             <p14:sldId id="256"/>
           </p14:sldIdLst>
         </p14:section>
-        <p14:section name="Idea" id="{0e31d7ec-5dd2-aa04-02c6-f22bb74ef2e3}">
+        <p14:section name="Idea" id="{947cc86a-ad30-315d-6746-b66e11953c6e}">
           <p14:sldIdLst>
             <p14:sldId id="257"/>
           </p14:sldIdLst>
         </p14:section>
-        <p14:section name="How it works" id="{4fe78d61-1ce5-c69b-9d70-b63c7e5a29f9}">
+        <p14:section name="How it works" id="{1f44d05f-2d36-47dd-3f95-41c1e9ed2b34}">
           <p14:sldIdLst>
             <p14:sldId id="258"/>
           </p14:sldIdLst>
         </p14:section>
-        <p14:section name="Demo" id="{2ec562de-ffe4-5367-59d8-bf6f21b7c8e7}">
+        <p14:section name="Demo" id="{27c5e9d8-9f3d-b4dc-fc07-9f0ecb2b9deb}">
           <p14:sldIdLst>
             <p14:sldId id="259"/>
             <p14:sldId id="261"/>
             <p14:sldId id="262"/>
           </p14:sldIdLst>
         </p14:section>
-        <p14:section name="Results" id="{3c0a8093-791a-ddfe-a12c-991e7ce7b016}">
+        <p14:section name="Results" id="{089cce37-6d46-a3b5-4953-bb1f82dcc700}">
           <p14:sldIdLst>
             <p14:sldId id="260"/>
           </p14:sldIdLst>
         </p14:section>
-        <p14:section name="Findings" id="{aa3c090b-524b-e15d-1bac-b07c5850b8d1}">
+        <p14:section name="Findings" id="{7b8f157d-ca55-6fab-da68-4410d93248b7}">
           <p14:sldIdLst>
             <p14:sldId id="263"/>
           </p14:sldIdLst>
         </p14:section>
-        <p14:section name="Next" id="{3ab3bb57-3570-b4a7-91f3-86be07660d51}">
+        <p14:section name="Next" id="{b06cdb3d-acc3-8292-da72-cc06f7808b70}">
           <p14:sldIdLst>
             <p14:sldId id="264"/>
             <p14:sldId id="265"/>
@@ -2768,7 +2768,7 @@
                 <a:ea typeface="Cambria" pitchFamily="34" charset="-122"/>
                 <a:cs typeface="Cambria" pitchFamily="34" charset="-120"/>
               </a:rPr>
-              <a:t>18</a:t>
+              <a:t>54</a:t>
             </a:r>
             <a:endParaRPr lang="en-US" sz="5400" dirty="0"/>
           </a:p>
@@ -5626,7 +5626,7 @@
                   <a:schemeClr val="tx1"/>
                 </a:solidFill>
               </a:rPr>
-              <a:t>Upload a clip and it runs as a background job</a:t>
+              <a:t>Upload a clip: it runs as a background job that survives restarts</a:t>
             </a:r>
             <a:endParaRPr lang="en-US" sz="1800" dirty="0"/>
           </a:p>
@@ -5681,6 +5681,24 @@
                 </a:solidFill>
               </a:rPr>
               <a:t>Shopper behaviour groups: passer-by, browser, engaged</a:t>
+            </a:r>
+            <a:endParaRPr lang="en-US" sz="1800" dirty="0"/>
+          </a:p>
+          <a:p>
+            <a:pPr marL="342900" indent="-342900">
+              <a:spcAft>
+                <a:spcPts val="1200"/>
+              </a:spcAft>
+              <a:buSzPct val="100000"/>
+              <a:buChar char="•"/>
+            </a:pPr>
+            <a:r>
+              <a:rPr lang="en-US" sz="1800" dirty="0">
+                <a:solidFill>
+                  <a:schemeClr val="tx1"/>
+                </a:solidFill>
+              </a:rPr>
+              <a:t>Draw counting lines per camera, set retention, and delete data</a:t>
             </a:r>
             <a:endParaRPr lang="en-US" sz="1800" dirty="0"/>
           </a:p>
@@ -8109,7 +8127,7 @@
                   <a:schemeClr val="tx2"/>
                 </a:solidFill>
               </a:rPr>
-              <a:t>Entrance-line setup screen, user accounts, longer-video handling</a:t>
+              <a:t>Per-user accounts, HTTPS, continuous live streaming on a real camera</a:t>
             </a:r>
             <a:endParaRPr lang="en-US" sz="1400" dirty="0"/>
           </a:p>

--- a/docs/RetailVision_presentation.pptx
+++ b/docs/RetailVision_presentation.pptx
@@ -116,39 +116,39 @@
   <p:extLst>
     <p:ext uri="{521415D9-36F7-43E2-AB2F-B90AF26B5E84}">
       <p14:sectionLst xmlns:p14="http://schemas.microsoft.com/office/powerpoint/2010/main">
-        <p14:section name="Opening" id="{f2143fbe-2a7b-db73-01ab-a917b4883e28}">
+        <p14:section name="Opening" id="{8e61a08e-3967-d905-8223-a168f69f41e1}">
           <p14:sldIdLst>
             <p14:sldId id="256"/>
           </p14:sldIdLst>
         </p14:section>
-        <p14:section name="Idea" id="{947cc86a-ad30-315d-6746-b66e11953c6e}">
+        <p14:section name="Idea" id="{320da18c-a1e8-3be5-5a11-45e03978093a}">
           <p14:sldIdLst>
             <p14:sldId id="257"/>
           </p14:sldIdLst>
         </p14:section>
-        <p14:section name="How it works" id="{1f44d05f-2d36-47dd-3f95-41c1e9ed2b34}">
+        <p14:section name="How it works" id="{eac2756d-b96d-c8a8-62f8-32782a95670b}">
           <p14:sldIdLst>
             <p14:sldId id="258"/>
           </p14:sldIdLst>
         </p14:section>
-        <p14:section name="Demo" id="{27c5e9d8-9f3d-b4dc-fc07-9f0ecb2b9deb}">
+        <p14:section name="Demo" id="{2a22367b-bae7-73d8-4758-7f0e41140710}">
           <p14:sldIdLst>
             <p14:sldId id="259"/>
             <p14:sldId id="261"/>
             <p14:sldId id="262"/>
           </p14:sldIdLst>
         </p14:section>
-        <p14:section name="Results" id="{089cce37-6d46-a3b5-4953-bb1f82dcc700}">
+        <p14:section name="Results" id="{e6c3d953-f1bd-03d6-62a6-35b31e46226e}">
           <p14:sldIdLst>
             <p14:sldId id="260"/>
           </p14:sldIdLst>
         </p14:section>
-        <p14:section name="Findings" id="{7b8f157d-ca55-6fab-da68-4410d93248b7}">
+        <p14:section name="Findings" id="{ff7f5120-3731-d1e7-accc-16744a5607fb}">
           <p14:sldIdLst>
             <p14:sldId id="263"/>
           </p14:sldIdLst>
         </p14:section>
-        <p14:section name="Next" id="{b06cdb3d-acc3-8292-da72-cc06f7808b70}">
+        <p14:section name="Next" id="{c74bc607-f96b-397f-e9f3-455d07056e34}">
           <p14:sldIdLst>
             <p14:sldId id="264"/>
             <p14:sldId id="265"/>
@@ -2768,7 +2768,7 @@
                 <a:ea typeface="Cambria" pitchFamily="34" charset="-122"/>
                 <a:cs typeface="Cambria" pitchFamily="34" charset="-120"/>
               </a:rPr>
-              <a:t>54</a:t>
+              <a:t>72</a:t>
             </a:r>
             <a:endParaRPr lang="en-US" sz="5400" dirty="0"/>
           </a:p>
@@ -2804,7 +2804,7 @@
                   <a:schemeClr val="bg1"/>
                 </a:solidFill>
               </a:rPr>
-              <a:t>automated tests, CI passing</a:t>
+              <a:t>automated tests, all passing</a:t>
             </a:r>
             <a:endParaRPr lang="en-US" sz="1800" dirty="0"/>
           </a:p>
@@ -5418,7 +5418,7 @@
                 <a:ea typeface="Cambria" pitchFamily="34" charset="-122"/>
                 <a:cs typeface="Cambria" pitchFamily="34" charset="-120"/>
               </a:rPr>
-              <a:t>27/30</a:t>
+              <a:t>~90%</a:t>
             </a:r>
             <a:endParaRPr lang="en-US" sz="4800" dirty="0"/>
           </a:p>
@@ -5454,7 +5454,7 @@
                   <a:schemeClr val="tx2"/>
                 </a:solidFill>
               </a:rPr>
-              <a:t>test questions answered correctly by the local analyst</a:t>
+              <a:t>of unseen-wording questions answered correctly by the local analyst</a:t>
             </a:r>
             <a:endParaRPr lang="en-US" sz="1400" dirty="0"/>
           </a:p>

--- a/docs/RetailVision_presentation.pptx
+++ b/docs/RetailVision_presentation.pptx
@@ -116,39 +116,39 @@
   <p:extLst>
     <p:ext uri="{521415D9-36F7-43E2-AB2F-B90AF26B5E84}">
       <p14:sectionLst xmlns:p14="http://schemas.microsoft.com/office/powerpoint/2010/main">
-        <p14:section name="Opening" id="{8e61a08e-3967-d905-8223-a168f69f41e1}">
+        <p14:section name="Opening" id="{c26bab2b-9f54-9cf5-730c-d90a801976ad}">
           <p14:sldIdLst>
             <p14:sldId id="256"/>
           </p14:sldIdLst>
         </p14:section>
-        <p14:section name="Idea" id="{320da18c-a1e8-3be5-5a11-45e03978093a}">
+        <p14:section name="Idea" id="{86a1ab7c-d3fb-69b5-cb0d-220b4552b25c}">
           <p14:sldIdLst>
             <p14:sldId id="257"/>
           </p14:sldIdLst>
         </p14:section>
-        <p14:section name="How it works" id="{eac2756d-b96d-c8a8-62f8-32782a95670b}">
+        <p14:section name="How it works" id="{1dd646a8-bf60-6977-e4cd-507842a294ad}">
           <p14:sldIdLst>
             <p14:sldId id="258"/>
           </p14:sldIdLst>
         </p14:section>
-        <p14:section name="Demo" id="{2a22367b-bae7-73d8-4758-7f0e41140710}">
+        <p14:section name="Demo" id="{b2041aa8-986e-1170-0015-1e7a68732dc8}">
           <p14:sldIdLst>
             <p14:sldId id="259"/>
             <p14:sldId id="261"/>
             <p14:sldId id="262"/>
           </p14:sldIdLst>
         </p14:section>
-        <p14:section name="Results" id="{e6c3d953-f1bd-03d6-62a6-35b31e46226e}">
+        <p14:section name="Results" id="{770cd4c0-1748-d127-a20c-4570ede9e6a4}">
           <p14:sldIdLst>
             <p14:sldId id="260"/>
           </p14:sldIdLst>
         </p14:section>
-        <p14:section name="Findings" id="{ff7f5120-3731-d1e7-accc-16744a5607fb}">
+        <p14:section name="Findings" id="{1013d79d-153d-6d60-ab8c-13526b71a5f9}">
           <p14:sldIdLst>
             <p14:sldId id="263"/>
           </p14:sldIdLst>
         </p14:section>
-        <p14:section name="Next" id="{c74bc607-f96b-397f-e9f3-455d07056e34}">
+        <p14:section name="Next" id="{a0fc3c66-7fc7-b20b-94c4-58f825c3988a}">
           <p14:sldIdLst>
             <p14:sldId id="264"/>
             <p14:sldId id="265"/>
@@ -2768,7 +2768,7 @@
                 <a:ea typeface="Cambria" pitchFamily="34" charset="-122"/>
                 <a:cs typeface="Cambria" pitchFamily="34" charset="-120"/>
               </a:rPr>
-              <a:t>72</a:t>
+              <a:t>84</a:t>
             </a:r>
             <a:endParaRPr lang="en-US" sz="5400" dirty="0"/>
           </a:p>
@@ -6661,7 +6661,7 @@
                   <a:schemeClr val="accent3"/>
                 </a:solidFill>
               </a:rPr>
-              <a:t>Staff / bag labels</a:t>
+              <a:t>Bag and staff labels</a:t>
             </a:r>
             <a:endParaRPr lang="en-US" sz="2200" dirty="0"/>
           </a:p>
@@ -6733,7 +6733,7 @@
                   <a:schemeClr val="tx1"/>
                 </a:solidFill>
               </a:rPr>
-              <a:t>CLIP guessed worse than 'nobody has a bag' (accuracy 0.48 to 0.54 vs 0.63) on 90-pixel crops.</a:t>
+              <a:t>Bag check: below baseline on small mall crops, but 74% vs 51% on people 180+ px tall (53 crops). Staff vs customer: never validated.</a:t>
             </a:r>
             <a:endParaRPr lang="en-US" sz="1500" dirty="0"/>
           </a:p>
@@ -6805,7 +6805,7 @@
                   <a:schemeClr val="tx1"/>
                 </a:solidFill>
               </a:rPr>
-              <a:t>Switched off by default; the system says 'unknown' instead of a wrong label.</a:t>
+              <a:t>Bag check only for 180+ px crops and opt-in; staff label stays off.</a:t>
             </a:r>
             <a:endParaRPr lang="en-US" sz="1500" dirty="0"/>
           </a:p>
@@ -6868,7 +6868,7 @@
                   <a:schemeClr val="accent3"/>
                 </a:solidFill>
               </a:rPr>
-              <a:t>Unique visitors</a:t>
+              <a:t>Crossings and visitors</a:t>
             </a:r>
             <a:endParaRPr lang="en-US" sz="2200" dirty="0"/>
           </a:p>
@@ -6940,7 +6940,7 @@
                   <a:schemeClr val="tx1"/>
                 </a:solidFill>
               </a:rPr>
-              <a:t>Identity fragments across the crowd, so the count for one 200 s clip could be anywhere from about 230 to 350.</a:t>
+              <a:t>Hand-labelled entrance clip: precision 70%, recall 71%. Reported 57 vs ~52 real, because errors offset. People tracked is inflated by ID switches.</a:t>
             </a:r>
             <a:endParaRPr lang="en-US" sz="1500" dirty="0"/>
           </a:p>
@@ -7012,7 +7012,7 @@
                   <a:schemeClr val="tx1"/>
                 </a:solidFill>
               </a:rPr>
-              <a:t>Report occupancy and entrance crossings instead; call the number an estimate.</a:t>
+              <a:t>Report crossings as an estimate, cancel flip-flops, keep people tracked labelled an estimate.</a:t>
             </a:r>
             <a:endParaRPr lang="en-US" sz="1500" dirty="0"/>
           </a:p>
@@ -7075,7 +7075,7 @@
                   <a:schemeClr val="accent3"/>
                 </a:solidFill>
               </a:rPr>
-              <a:t>LSTM forecast</a:t>
+              <a:t>Forecast</a:t>
             </a:r>
             <a:endParaRPr lang="en-US" sz="2200" dirty="0"/>
           </a:p>
@@ -7147,7 +7147,7 @@
                   <a:schemeClr val="tx1"/>
                 </a:solidFill>
               </a:rPr>
-              <a:t>On 17 minutes of data it only tied 'same as last value'. An LSTM needs days of history.</a:t>
+              <a:t>On 17 minutes of data the LSTM only tied 'same as last value'. It needs days of history, which we do not have.</a:t>
             </a:r>
             <a:endParaRPr lang="en-US" sz="1500" dirty="0"/>
           </a:p>
@@ -7219,7 +7219,7 @@
                   <a:schemeClr val="tx1"/>
                 </a:solidFill>
               </a:rPr>
-              <a:t>Forecast backtests itself and falls back to the baseline when it does not win.</a:t>
+              <a:t>Backtests LSTM, last value and same-hour-yesterday and uses the winner; a monitor collects the data.</a:t>
             </a:r>
             <a:endParaRPr lang="en-US" sz="1500" dirty="0"/>
           </a:p>
